--- a/docs/presentaciones/classes/clase-166-tf-serving-grpc-presentacion.pptx
+++ b/docs/presentaciones/classes/clase-166-tf-serving-grpc-presentacion.pptx
@@ -4779,7 +4779,7 @@
                 </a:solidFill>
                 <a:latin typeface="Segoe UI"/>
               </a:rPr>
-              <a:t>Primer bloque ejecutable del notebook.</a:t>
+              <a:t>TF Serving sirve el formato SavedModel (grafo + variables + signature). La carpeta de versión (1/) es obligatoria: TF Serving sirve por defecto la versión numérica más alta.</a:t>
             </a:r>
           </a:p>
         </p:txBody>
@@ -4866,7 +4866,387 @@
                 </a:solidFill>
                 <a:latin typeface="Courier New"/>
               </a:rPr>
-              <a:t># Imports y configuración inicial</a:t>
+              <a:t>import numpy as np</a:t>
+            </a:r>
+          </a:p>
+          <a:p>
+            <a:pPr>
+              <a:defRPr sz="1200" b="0">
+                <a:solidFill>
+                  <a:srgbClr val="F8FAFC"/>
+                </a:solidFill>
+                <a:latin typeface="Courier New"/>
+              </a:defRPr>
+            </a:pPr>
+            <a:r>
+              <a:rPr sz="1200" b="0">
+                <a:solidFill>
+                  <a:srgbClr val="F8FAFC"/>
+                </a:solidFill>
+                <a:latin typeface="Courier New"/>
+              </a:rPr>
+              <a:t>np.random.seed(42)</a:t>
+            </a:r>
+          </a:p>
+          <a:p>
+            <a:pPr>
+              <a:defRPr sz="1200" b="0">
+                <a:solidFill>
+                  <a:srgbClr val="F8FAFC"/>
+                </a:solidFill>
+                <a:latin typeface="Courier New"/>
+              </a:defRPr>
+            </a:pPr>
+            <a:r>
+              <a:rPr sz="1200" b="0">
+                <a:solidFill>
+                  <a:srgbClr val="F8FAFC"/>
+                </a:solidFill>
+                <a:latin typeface="Courier New"/>
+              </a:rPr>
+              <a:t> </a:t>
+            </a:r>
+          </a:p>
+          <a:p>
+            <a:pPr>
+              <a:defRPr sz="1200" b="0">
+                <a:solidFill>
+                  <a:srgbClr val="F8FAFC"/>
+                </a:solidFill>
+                <a:latin typeface="Courier New"/>
+              </a:defRPr>
+            </a:pPr>
+            <a:r>
+              <a:rPr sz="1200" b="0">
+                <a:solidFill>
+                  <a:srgbClr val="F8FAFC"/>
+                </a:solidFill>
+                <a:latin typeface="Courier New"/>
+              </a:rPr>
+              <a:t>try:</a:t>
+            </a:r>
+          </a:p>
+          <a:p>
+            <a:pPr>
+              <a:defRPr sz="1200" b="0">
+                <a:solidFill>
+                  <a:srgbClr val="F8FAFC"/>
+                </a:solidFill>
+                <a:latin typeface="Courier New"/>
+              </a:defRPr>
+            </a:pPr>
+            <a:r>
+              <a:rPr sz="1200" b="0">
+                <a:solidFill>
+                  <a:srgbClr val="F8FAFC"/>
+                </a:solidFill>
+                <a:latin typeface="Courier New"/>
+              </a:rPr>
+              <a:t>    import tensorflow as tf</a:t>
+            </a:r>
+          </a:p>
+          <a:p>
+            <a:pPr>
+              <a:defRPr sz="1200" b="0">
+                <a:solidFill>
+                  <a:srgbClr val="F8FAFC"/>
+                </a:solidFill>
+                <a:latin typeface="Courier New"/>
+              </a:defRPr>
+            </a:pPr>
+            <a:r>
+              <a:rPr sz="1200" b="0">
+                <a:solidFill>
+                  <a:srgbClr val="F8FAFC"/>
+                </a:solidFill>
+                <a:latin typeface="Courier New"/>
+              </a:rPr>
+              <a:t>    from tensorflow import keras</a:t>
+            </a:r>
+          </a:p>
+          <a:p>
+            <a:pPr>
+              <a:defRPr sz="1200" b="0">
+                <a:solidFill>
+                  <a:srgbClr val="F8FAFC"/>
+                </a:solidFill>
+                <a:latin typeface="Courier New"/>
+              </a:defRPr>
+            </a:pPr>
+            <a:r>
+              <a:rPr sz="1200" b="0">
+                <a:solidFill>
+                  <a:srgbClr val="F8FAFC"/>
+                </a:solidFill>
+                <a:latin typeface="Courier New"/>
+              </a:rPr>
+              <a:t>    TF_OK = True</a:t>
+            </a:r>
+          </a:p>
+          <a:p>
+            <a:pPr>
+              <a:defRPr sz="1200" b="0">
+                <a:solidFill>
+                  <a:srgbClr val="F8FAFC"/>
+                </a:solidFill>
+                <a:latin typeface="Courier New"/>
+              </a:defRPr>
+            </a:pPr>
+            <a:r>
+              <a:rPr sz="1200" b="0">
+                <a:solidFill>
+                  <a:srgbClr val="F8FAFC"/>
+                </a:solidFill>
+                <a:latin typeface="Courier New"/>
+              </a:rPr>
+              <a:t>except Exception:</a:t>
+            </a:r>
+          </a:p>
+          <a:p>
+            <a:pPr>
+              <a:defRPr sz="1200" b="0">
+                <a:solidFill>
+                  <a:srgbClr val="F8FAFC"/>
+                </a:solidFill>
+                <a:latin typeface="Courier New"/>
+              </a:defRPr>
+            </a:pPr>
+            <a:r>
+              <a:rPr sz="1200" b="0">
+                <a:solidFill>
+                  <a:srgbClr val="F8FAFC"/>
+                </a:solidFill>
+                <a:latin typeface="Courier New"/>
+              </a:rPr>
+              <a:t>    TF_OK = False</a:t>
+            </a:r>
+          </a:p>
+          <a:p>
+            <a:pPr>
+              <a:defRPr sz="1200" b="0">
+                <a:solidFill>
+                  <a:srgbClr val="F8FAFC"/>
+                </a:solidFill>
+                <a:latin typeface="Courier New"/>
+              </a:defRPr>
+            </a:pPr>
+            <a:r>
+              <a:rPr sz="1200" b="0">
+                <a:solidFill>
+                  <a:srgbClr val="F8FAFC"/>
+                </a:solidFill>
+                <a:latin typeface="Courier New"/>
+              </a:rPr>
+              <a:t>    print("tensorflow no instalado -&gt; se muestra la API de export (no se ejecuta)")</a:t>
+            </a:r>
+          </a:p>
+          <a:p>
+            <a:pPr>
+              <a:defRPr sz="1200" b="0">
+                <a:solidFill>
+                  <a:srgbClr val="F8FAFC"/>
+                </a:solidFill>
+                <a:latin typeface="Courier New"/>
+              </a:defRPr>
+            </a:pPr>
+            <a:r>
+              <a:rPr sz="1200" b="0">
+                <a:solidFill>
+                  <a:srgbClr val="F8FAFC"/>
+                </a:solidFill>
+                <a:latin typeface="Courier New"/>
+              </a:rPr>
+              <a:t> </a:t>
+            </a:r>
+          </a:p>
+          <a:p>
+            <a:pPr>
+              <a:defRPr sz="1200" b="0">
+                <a:solidFill>
+                  <a:srgbClr val="F8FAFC"/>
+                </a:solidFill>
+                <a:latin typeface="Courier New"/>
+              </a:defRPr>
+            </a:pPr>
+            <a:r>
+              <a:rPr sz="1200" b="0">
+                <a:solidFill>
+                  <a:srgbClr val="F8FAFC"/>
+                </a:solidFill>
+                <a:latin typeface="Courier New"/>
+              </a:rPr>
+              <a:t>if TF_OK:</a:t>
+            </a:r>
+          </a:p>
+          <a:p>
+            <a:pPr>
+              <a:defRPr sz="1200" b="0">
+                <a:solidFill>
+                  <a:srgbClr val="F8FAFC"/>
+                </a:solidFill>
+                <a:latin typeface="Courier New"/>
+              </a:defRPr>
+            </a:pPr>
+            <a:r>
+              <a:rPr sz="1200" b="0">
+                <a:solidFill>
+                  <a:srgbClr val="F8FAFC"/>
+                </a:solidFill>
+                <a:latin typeface="Courier New"/>
+              </a:rPr>
+              <a:t>    model = keras.Sequential([</a:t>
+            </a:r>
+          </a:p>
+          <a:p>
+            <a:pPr>
+              <a:defRPr sz="1200" b="0">
+                <a:solidFill>
+                  <a:srgbClr val="F8FAFC"/>
+                </a:solidFill>
+                <a:latin typeface="Courier New"/>
+              </a:defRPr>
+            </a:pPr>
+            <a:r>
+              <a:rPr sz="1200" b="0">
+                <a:solidFill>
+                  <a:srgbClr val="F8FAFC"/>
+                </a:solidFill>
+                <a:latin typeface="Courier New"/>
+              </a:rPr>
+              <a:t>        keras.Input(shape=(784,)),</a:t>
+            </a:r>
+          </a:p>
+          <a:p>
+            <a:pPr>
+              <a:defRPr sz="1200" b="0">
+                <a:solidFill>
+                  <a:srgbClr val="F8FAFC"/>
+                </a:solidFill>
+                <a:latin typeface="Courier New"/>
+              </a:defRPr>
+            </a:pPr>
+            <a:r>
+              <a:rPr sz="1200" b="0">
+                <a:solidFill>
+                  <a:srgbClr val="F8FAFC"/>
+                </a:solidFill>
+                <a:latin typeface="Courier New"/>
+              </a:rPr>
+              <a:t>        keras.layers.Dense(64, activation="relu"),</a:t>
+            </a:r>
+          </a:p>
+          <a:p>
+            <a:pPr>
+              <a:defRPr sz="1200" b="0">
+                <a:solidFill>
+                  <a:srgbClr val="F8FAFC"/>
+                </a:solidFill>
+                <a:latin typeface="Courier New"/>
+              </a:defRPr>
+            </a:pPr>
+            <a:r>
+              <a:rPr sz="1200" b="0">
+                <a:solidFill>
+                  <a:srgbClr val="F8FAFC"/>
+                </a:solidFill>
+                <a:latin typeface="Courier New"/>
+              </a:rPr>
+              <a:t>        keras.layers.Dense(10, activation="softmax"),</a:t>
+            </a:r>
+          </a:p>
+          <a:p>
+            <a:pPr>
+              <a:defRPr sz="1200" b="0">
+                <a:solidFill>
+                  <a:srgbClr val="F8FAFC"/>
+                </a:solidFill>
+                <a:latin typeface="Courier New"/>
+              </a:defRPr>
+            </a:pPr>
+            <a:r>
+              <a:rPr sz="1200" b="0">
+                <a:solidFill>
+                  <a:srgbClr val="F8FAFC"/>
+                </a:solidFill>
+                <a:latin typeface="Courier New"/>
+              </a:rPr>
+              <a:t>    ])</a:t>
+            </a:r>
+          </a:p>
+          <a:p>
+            <a:pPr>
+              <a:defRPr sz="1200" b="0">
+                <a:solidFill>
+                  <a:srgbClr val="F8FAFC"/>
+                </a:solidFill>
+                <a:latin typeface="Courier New"/>
+              </a:defRPr>
+            </a:pPr>
+            <a:r>
+              <a:rPr sz="1200" b="0">
+                <a:solidFill>
+                  <a:srgbClr val="F8FAFC"/>
+                </a:solidFill>
+                <a:latin typeface="Courier New"/>
+              </a:rPr>
+              <a:t>    model.export("servable/1/")                 # Keras 3: escribe un SavedModel servible</a:t>
+            </a:r>
+          </a:p>
+          <a:p>
+            <a:pPr>
+              <a:defRPr sz="1200" b="0">
+                <a:solidFill>
+                  <a:srgbClr val="F8FAFC"/>
+                </a:solidFill>
+                <a:latin typeface="Courier New"/>
+              </a:defRPr>
+            </a:pPr>
+            <a:r>
+              <a:rPr sz="1200" b="0">
+                <a:solidFill>
+                  <a:srgbClr val="F8FAFC"/>
+                </a:solidFill>
+                <a:latin typeface="Courier New"/>
+              </a:rPr>
+              <a:t>    print("SavedModel exportado en servable/1/  (saved_model.pb, variables/, assets/)")</a:t>
+            </a:r>
+          </a:p>
+          <a:p>
+            <a:pPr>
+              <a:defRPr sz="1200" b="0">
+                <a:solidFill>
+                  <a:srgbClr val="F8FAFC"/>
+                </a:solidFill>
+                <a:latin typeface="Courier New"/>
+              </a:defRPr>
+            </a:pPr>
+            <a:r>
+              <a:rPr sz="1200" b="0">
+                <a:solidFill>
+                  <a:srgbClr val="F8FAFC"/>
+                </a:solidFill>
+                <a:latin typeface="Courier New"/>
+              </a:rPr>
+              <a:t>else:</a:t>
+            </a:r>
+          </a:p>
+          <a:p>
+            <a:pPr>
+              <a:defRPr sz="1200" b="0">
+                <a:solidFill>
+                  <a:srgbClr val="F8FAFC"/>
+                </a:solidFill>
+                <a:latin typeface="Courier New"/>
+              </a:defRPr>
+            </a:pPr>
+            <a:r>
+              <a:rPr sz="1200" b="0">
+                <a:solidFill>
+                  <a:srgbClr val="F8FAFC"/>
+                </a:solidFill>
+                <a:latin typeface="Courier New"/>
+              </a:rPr>
+              <a:t># ... (truncado)</a:t>
             </a:r>
           </a:p>
         </p:txBody>

--- a/docs/presentaciones/classes/clase-166-tf-serving-grpc-presentacion.pptx
+++ b/docs/presentaciones/classes/clase-166-tf-serving-grpc-presentacion.pptx
@@ -3272,7 +3272,7 @@
                 </a:solidFill>
                 <a:latin typeface="Segoe UI"/>
               </a:rPr>
-              <a:t>Parte: 2 — Deep Learning · Fuente: Géron, cap. 19 § Deploying a Model to a Service + docs ONNX, TensorRT, vLLM, TGI.  Duración estimada: 100 min.</a:t>
+              <a:t>Parte: 2 — Deep Learning · Fuente: Géron, cap. 19 § Deploying a Model to a Service + docs ONNX, TensorRT, vLLM, TGI.  Duración estimada: 100 min. · Nivel: Avanzado</a:t>
             </a:r>
           </a:p>
         </p:txBody>
@@ -3581,7 +3581,7 @@
                 </a:solidFill>
                 <a:latin typeface="Segoe UI"/>
               </a:rPr>
-              <a:t>Parte: 2 — Deep Learning · Fuente: Géron, cap. 19 § Deploying a Model to a Service + docs ONNX, TensorRT, vLLM, TGI.  Duración estimada: 100 min.</a:t>
+              <a:t>Parte: 2 — Deep Learning · Fuente: Géron, cap. 19 § Deploying a Model to a Service + docs ONNX, TensorRT, vLLM, TGI.  Duración estimada: 100 min. · Nivel: Avanzado</a:t>
             </a:r>
           </a:p>
         </p:txBody>
